--- a/Capitulo 4/Comparativa_Modelos_IA.pptx
+++ b/Capitulo 4/Comparativa_Modelos_IA.pptx
@@ -15,6 +15,7 @@
     <p:sldId id="263" r:id="rId9"/>
     <p:sldId id="264" r:id="rId10"/>
     <p:sldId id="265" r:id="rId11"/>
+    <p:sldId id="266" r:id="rId16"/>
   </p:sldIdLst>
   <p:sldSz cx="9144000" cy="6858000" type="screen4x3"/>
   <p:notesSz cx="6858000" cy="9144000"/>
@@ -3201,7 +3202,7 @@
           <a:p>
             <a:r>
               <a:rPr lang="es-CO" dirty="0"/>
-              <a:t>Septiembre 2025</a:t>
+              <a:t>Verificado en septiembre de 2026</a:t>
             </a:r>
             <a:endParaRPr dirty="0"/>
           </a:p>
@@ -3295,6 +3296,98 @@
           <a:p>
             <a:r>
               <a:t>Búsqueda en documentos: —</a:t>
+            </a:r>
+          </a:p>
+        </p:txBody>
+      </p:sp>
+    </p:spTree>
+  </p:cSld>
+  <p:clrMapOvr>
+    <a:masterClrMapping/>
+  </p:clrMapOvr>
+</p:sld>
+</file>
+
+<file path=ppt/slides/slide11.xml><?xml version="1.0" encoding="utf-8"?>
+<p:sld xmlns:a="http://schemas.openxmlformats.org/drawingml/2006/main" xmlns:r="http://schemas.openxmlformats.org/officeDocument/2006/relationships" xmlns:p="http://schemas.openxmlformats.org/presentationml/2006/main">
+  <p:cSld>
+    <p:spTree>
+      <p:nvGrpSpPr>
+        <p:cNvPr id="1" name=""/>
+        <p:cNvGrpSpPr/>
+        <p:nvPr/>
+      </p:nvGrpSpPr>
+      <p:grpSpPr>
+        <a:xfrm>
+          <a:off x="0" y="0"/>
+          <a:ext cx="0" cy="0"/>
+          <a:chOff x="0" y="0"/>
+          <a:chExt cx="0" cy="0"/>
+        </a:xfrm>
+      </p:grpSpPr>
+      <p:sp>
+        <p:nvSpPr>
+          <p:cNvPr id="2" name="Title 1"/>
+          <p:cNvSpPr>
+            <a:spLocks noGrp="1"/>
+          </p:cNvSpPr>
+          <p:nvPr>
+            <p:ph type="title"/>
+          </p:nvPr>
+        </p:nvSpPr>
+        <p:spPr/>
+        <p:txBody>
+          <a:bodyPr/>
+          <a:lstStyle/>
+          <a:p>
+            <a:r>
+              <a:t>Mistral (Vibe)</a:t>
+            </a:r>
+          </a:p>
+        </p:txBody>
+      </p:sp>
+      <p:sp>
+        <p:nvSpPr>
+          <p:cNvPr id="3" name="Content Placeholder 2"/>
+          <p:cNvSpPr>
+            <a:spLocks noGrp="1"/>
+          </p:cNvSpPr>
+          <p:nvPr>
+            <p:ph idx="1"/>
+          </p:nvPr>
+        </p:nvSpPr>
+        <p:spPr/>
+        <p:txBody>
+          <a:bodyPr/>
+          <a:lstStyle/>
+          <a:p>
+            <a:r>
+              <a:t>Entrada de imágenes: Sí</a:t>
+            </a:r>
+          </a:p>
+          <a:p>
+            <a:r>
+              <a:t>Generación de imágenes: Sí, también en el plan gratuito</a:t>
+            </a:r>
+          </a:p>
+          <a:p>
+            <a:r>
+              <a:t>Deep search: Sin verificar</a:t>
+            </a:r>
+          </a:p>
+          <a:p>
+            <a:r>
+              <a:t>Modo estudiante: No formal. Descuento para estudiantes</a:t>
+            </a:r>
+          </a:p>
+          <a:p>
+            <a:r>
+              <a:t>Búsqueda web: Sí, limitada en el plan gratuito</a:t>
+            </a:r>
+          </a:p>
+          <a:p>
+            <a:r>
+              <a:t>Búsqueda en documentos: Sí</a:t>
             </a:r>
           </a:p>
         </p:txBody>
@@ -3557,33 +3650,33 @@
                     <a:p>
                       <a:r>
                         <a:rPr sz="1200"/>
-                        <a:t>Limitado (Plus/Enterprise)</a:t>
-                      </a:r>
-                    </a:p>
-                  </a:txBody>
-                  <a:tcPr/>
-                </a:tc>
-                <a:tc>
-                  <a:txBody>
-                    <a:bodyPr/>
-                    <a:lstStyle/>
-                    <a:p>
-                      <a:r>
-                        <a:rPr sz="1200"/>
-                        <a:t>Sí (DALL·E con límite)</a:t>
-                      </a:r>
-                    </a:p>
-                  </a:txBody>
-                  <a:tcPr/>
-                </a:tc>
-                <a:tc>
-                  <a:txBody>
-                    <a:bodyPr/>
-                    <a:lstStyle/>
-                    <a:p>
-                      <a:r>
-                        <a:rPr sz="1200"/>
-                        <a:t>Sí (limitado en Free)</a:t>
+                        <a:t>Sí, con límites</a:t>
+                      </a:r>
+                    </a:p>
+                  </a:txBody>
+                  <a:tcPr/>
+                </a:tc>
+                <a:tc>
+                  <a:txBody>
+                    <a:bodyPr/>
+                    <a:lstStyle/>
+                    <a:p>
+                      <a:r>
+                        <a:rPr sz="1200"/>
+                        <a:t>Sí, con límites</a:t>
+                      </a:r>
+                    </a:p>
+                  </a:txBody>
+                  <a:tcPr/>
+                </a:tc>
+                <a:tc>
+                  <a:txBody>
+                    <a:bodyPr/>
+                    <a:lstStyle/>
+                    <a:p>
+                      <a:r>
+                        <a:rPr sz="1200"/>
+                        <a:t>Sí (Deep Research)</a:t>
                       </a:r>
                     </a:p>
                   </a:txBody>
@@ -3668,7 +3761,7 @@
                     <a:p>
                       <a:r>
                         <a:rPr sz="1200"/>
-                        <a:t>Sí (Nano Banana)</a:t>
+                        <a:t>Sí, genera y edita</a:t>
                       </a:r>
                     </a:p>
                   </a:txBody>
@@ -3782,20 +3875,8 @@
                     <a:lstStyle/>
                     <a:p>
                       <a:r>
-                        <a:rPr sz="1200" dirty="0"/>
-                        <a:t>No (</a:t>
-                      </a:r>
-                      <a:r>
-                        <a:rPr sz="1200" dirty="0" err="1"/>
-                        <a:t>pero</a:t>
-                      </a:r>
-                      <a:r>
-                        <a:rPr lang="es-CO" sz="1200" dirty="0"/>
-                        <a:t> sí</a:t>
-                      </a:r>
-                      <a:r>
-                        <a:rPr sz="1200" dirty="0"/>
-                        <a:t> Web Search)</a:t>
+                        <a:rPr sz="1200"/>
+                        <a:t>No, pero con búsqueda web</a:t>
                       </a:r>
                     </a:p>
                   </a:txBody>
@@ -4179,7 +4260,7 @@
                     <a:p>
                       <a:r>
                         <a:rPr sz="1200"/>
-                        <a:t>No confirmado</a:t>
+                        <a:t>Sin verificar</a:t>
                       </a:r>
                     </a:p>
                   </a:txBody>
@@ -4341,6 +4422,99 @@
                     <a16:rowId xmlns:a16="http://schemas.microsoft.com/office/drawing/2014/main" val="10008"/>
                   </a:ext>
                 </a:extLst>
+              </a:tr>
+              <a:tr h="457200">
+                <a:tc>
+                  <a:txBody>
+                    <a:bodyPr/>
+                    <a:lstStyle/>
+                    <a:p>
+                      <a:r>
+                        <a:rPr sz="1200"/>
+                        <a:t>Mistral (Vibe)</a:t>
+                      </a:r>
+                    </a:p>
+                  </a:txBody>
+                  <a:tcPr/>
+                </a:tc>
+                <a:tc>
+                  <a:txBody>
+                    <a:bodyPr/>
+                    <a:lstStyle/>
+                    <a:p>
+                      <a:r>
+                        <a:rPr sz="1200"/>
+                        <a:t>Sí</a:t>
+                      </a:r>
+                    </a:p>
+                  </a:txBody>
+                  <a:tcPr/>
+                </a:tc>
+                <a:tc>
+                  <a:txBody>
+                    <a:bodyPr/>
+                    <a:lstStyle/>
+                    <a:p>
+                      <a:r>
+                        <a:rPr sz="1200"/>
+                        <a:t>Sí</a:t>
+                      </a:r>
+                    </a:p>
+                  </a:txBody>
+                  <a:tcPr/>
+                </a:tc>
+                <a:tc>
+                  <a:txBody>
+                    <a:bodyPr/>
+                    <a:lstStyle/>
+                    <a:p>
+                      <a:r>
+                        <a:rPr sz="1200"/>
+                        <a:t>Sin verificar</a:t>
+                      </a:r>
+                    </a:p>
+                  </a:txBody>
+                  <a:tcPr/>
+                </a:tc>
+                <a:tc>
+                  <a:txBody>
+                    <a:bodyPr/>
+                    <a:lstStyle/>
+                    <a:p>
+                      <a:r>
+                        <a:rPr sz="1200"/>
+                        <a:t>No formal</a:t>
+                      </a:r>
+                    </a:p>
+                  </a:txBody>
+                  <a:tcPr/>
+                </a:tc>
+                <a:tc>
+                  <a:txBody>
+                    <a:bodyPr/>
+                    <a:lstStyle/>
+                    <a:p>
+                      <a:r>
+                        <a:rPr sz="1200"/>
+                        <a:t>Sí, limitada</a:t>
+                      </a:r>
+                    </a:p>
+                  </a:txBody>
+                  <a:tcPr/>
+                </a:tc>
+                <a:tc>
+                  <a:txBody>
+                    <a:bodyPr/>
+                    <a:lstStyle/>
+                    <a:p>
+                      <a:r>
+                        <a:rPr sz="1200"/>
+                        <a:t>Sí</a:t>
+                      </a:r>
+                    </a:p>
+                  </a:txBody>
+                  <a:tcPr/>
+                </a:tc>
               </a:tr>
             </a:tbl>
           </a:graphicData>
@@ -4408,17 +4582,17 @@
           <a:lstStyle/>
           <a:p>
             <a:r>
-              <a:t>Entrada de imágenes: Limitado (Plus/Enterprise)</a:t>
-            </a:r>
-          </a:p>
-          <a:p>
-            <a:r>
-              <a:t>Generación de imágenes: Sí (DALL·E con límite)</a:t>
-            </a:r>
-          </a:p>
-          <a:p>
-            <a:r>
-              <a:t>Deep search: Sí (limitado en Free)</a:t>
+              <a:t>Entrada de imágenes: Sí, con límites</a:t>
+            </a:r>
+          </a:p>
+          <a:p>
+            <a:r>
+              <a:t>Generación de imágenes: Sí, con límites</a:t>
+            </a:r>
+          </a:p>
+          <a:p>
+            <a:r>
+              <a:t>Deep search: Sí (Deep Research)</a:t>
             </a:r>
           </a:p>
           <a:p>
@@ -4428,7 +4602,7 @@
           </a:p>
           <a:p>
             <a:r>
-              <a:t>Búsqueda web: Sí</a:t>
+              <a:t>Búsqueda web: Sí, en todos los planes incluido el gratuito</a:t>
             </a:r>
           </a:p>
           <a:p>
@@ -4505,7 +4679,7 @@
           </a:p>
           <a:p>
             <a:r>
-              <a:t>Generación de imágenes: Sí (Nano Banana)</a:t>
+              <a:t>Generación de imágenes: Sí, genera y edita</a:t>
             </a:r>
           </a:p>
           <a:p>
@@ -4602,7 +4776,7 @@
           </a:p>
           <a:p>
             <a:r>
-              <a:t>Deep search: No (pero Web Search)</a:t>
+              <a:t>Deep search: No, pero con búsqueda web</a:t>
             </a:r>
           </a:p>
           <a:p>
@@ -4612,12 +4786,12 @@
           </a:p>
           <a:p>
             <a:r>
-              <a:t>Búsqueda web: Sí</a:t>
-            </a:r>
-          </a:p>
-          <a:p>
-            <a:r>
-              <a:t>Búsqueda en documentos: Sí</a:t>
+              <a:t>Búsqueda web: Sí, también en el plan gratuito</a:t>
+            </a:r>
+          </a:p>
+          <a:p>
+            <a:r>
+              <a:t>Búsqueda en documentos: Sí. Ejecuta código en el plan gratuito</a:t>
             </a:r>
           </a:p>
         </p:txBody>
@@ -4965,7 +5139,7 @@
           </a:p>
           <a:p>
             <a:r>
-              <a:t>Generación de imágenes: No confirmado</a:t>
+              <a:t>Generación de imágenes: Sin verificar</a:t>
             </a:r>
           </a:p>
           <a:p>
